--- a/docs/旅记-APP介绍.pptx
+++ b/docs/旅记-APP介绍.pptx
@@ -1342,7 +1342,7 @@
                 <a:ea typeface="Microsoft YaHei" pitchFamily="34" charset="-122"/>
                 <a:cs typeface="Microsoft YaHei" pitchFamily="34" charset="-120"/>
               </a:rPr>
-              <a:t>行程规划 + 记账分摊 · 家庭与团队旅行小工具</a:t>
+              <a:t>行程规划 + 记账分摊 · 结伴旅行小工具</a:t>
             </a:r>
             <a:endParaRPr lang="en-US" sz="1600" dirty="0"/>
           </a:p>
